--- a/CalendarioAgo2026/presentaciones/2_SolucionProblemas.pptx
+++ b/CalendarioAgo2026/presentaciones/2_SolucionProblemas.pptx
@@ -147,6 +147,35 @@
 </p:presentation>
 </file>
 
+<file path=ppt/changesInfos/changesInfo1.xml><?xml version="1.0" encoding="utf-8"?>
+<pc:chgInfo xmlns:a="http://schemas.openxmlformats.org/drawingml/2006/main" xmlns:r="http://schemas.openxmlformats.org/officeDocument/2006/relationships" xmlns:ac="http://schemas.microsoft.com/office/drawing/2013/main/command" xmlns:pc="http://schemas.microsoft.com/office/powerpoint/2013/main/command">
+  <pc:docChgLst>
+    <pc:chgData name="Lizethe Pérez Fuertes" userId="4ae9ef87-2a7d-42f8-8dfa-0a501a9e2ff4" providerId="ADAL" clId="{FDDD45CB-1330-4033-A842-3D2746AFF7C7}"/>
+    <pc:docChg chg="custSel modSld">
+      <pc:chgData name="Lizethe Pérez Fuertes" userId="4ae9ef87-2a7d-42f8-8dfa-0a501a9e2ff4" providerId="ADAL" clId="{FDDD45CB-1330-4033-A842-3D2746AFF7C7}" dt="2026-08-07T00:43:36.211" v="17" actId="27636"/>
+      <pc:docMkLst>
+        <pc:docMk/>
+      </pc:docMkLst>
+      <pc:sldChg chg="modSp mod">
+        <pc:chgData name="Lizethe Pérez Fuertes" userId="4ae9ef87-2a7d-42f8-8dfa-0a501a9e2ff4" providerId="ADAL" clId="{FDDD45CB-1330-4033-A842-3D2746AFF7C7}" dt="2026-08-07T00:43:36.211" v="17" actId="27636"/>
+        <pc:sldMkLst>
+          <pc:docMk/>
+          <pc:sldMk cId="2553855534" sldId="257"/>
+        </pc:sldMkLst>
+        <pc:spChg chg="mod">
+          <ac:chgData name="Lizethe Pérez Fuertes" userId="4ae9ef87-2a7d-42f8-8dfa-0a501a9e2ff4" providerId="ADAL" clId="{FDDD45CB-1330-4033-A842-3D2746AFF7C7}" dt="2026-08-07T00:43:36.211" v="17" actId="27636"/>
+          <ac:spMkLst>
+            <pc:docMk/>
+            <pc:sldMk cId="2553855534" sldId="257"/>
+            <ac:spMk id="2" creationId="{00000000-0000-0000-0000-000000000000}"/>
+          </ac:spMkLst>
+        </pc:spChg>
+      </pc:sldChg>
+    </pc:docChg>
+  </pc:docChgLst>
+</pc:chgInfo>
+</file>
+
 <file path=ppt/notesMasters/notesMaster1.xml><?xml version="1.0" encoding="utf-8"?>
 <p:notesMaster xmlns:a="http://schemas.openxmlformats.org/drawingml/2006/main" xmlns:r="http://schemas.openxmlformats.org/officeDocument/2006/relationships" xmlns:p="http://schemas.openxmlformats.org/presentationml/2006/main">
   <p:cSld>
@@ -229,7 +258,7 @@
           <a:p>
             <a:fld id="{2D445F07-8756-451B-A938-0248325FC7BB}" type="datetimeFigureOut">
               <a:rPr lang="es-MX" smtClean="0"/>
-              <a:t>09/08/2022</a:t>
+              <a:t>06/08/2026</a:t>
             </a:fld>
             <a:endParaRPr lang="es-MX" dirty="0"/>
           </a:p>
@@ -1518,7 +1547,7 @@
           <a:p>
             <a:fld id="{5E75A0DC-66C6-4CEC-A5EB-F8C97CEC3796}" type="datetimeFigureOut">
               <a:rPr lang="es-MX" smtClean="0"/>
-              <a:t>09/08/2022</a:t>
+              <a:t>06/08/2026</a:t>
             </a:fld>
             <a:endParaRPr lang="es-MX" dirty="0"/>
           </a:p>
@@ -1688,7 +1717,7 @@
           <a:p>
             <a:fld id="{5E75A0DC-66C6-4CEC-A5EB-F8C97CEC3796}" type="datetimeFigureOut">
               <a:rPr lang="es-MX" smtClean="0"/>
-              <a:t>09/08/2022</a:t>
+              <a:t>06/08/2026</a:t>
             </a:fld>
             <a:endParaRPr lang="es-MX" dirty="0"/>
           </a:p>
@@ -1868,7 +1897,7 @@
           <a:p>
             <a:fld id="{5E75A0DC-66C6-4CEC-A5EB-F8C97CEC3796}" type="datetimeFigureOut">
               <a:rPr lang="es-MX" smtClean="0"/>
-              <a:t>09/08/2022</a:t>
+              <a:t>06/08/2026</a:t>
             </a:fld>
             <a:endParaRPr lang="es-MX" dirty="0"/>
           </a:p>
@@ -2021,7 +2050,7 @@
           <a:p>
             <a:fld id="{1D8BD707-D9CF-40AE-B4C6-C98DA3205C09}" type="datetimeFigureOut">
               <a:rPr lang="en-US" smtClean="0"/>
-              <a:t>8/9/2022</a:t>
+              <a:t>8/6/2026</a:t>
             </a:fld>
             <a:endParaRPr lang="en-US"/>
           </a:p>
@@ -2145,7 +2174,7 @@
           <a:p>
             <a:fld id="{1D8BD707-D9CF-40AE-B4C6-C98DA3205C09}" type="datetimeFigureOut">
               <a:rPr lang="en-US" smtClean="0"/>
-              <a:t>8/9/2022</a:t>
+              <a:t>8/6/2026</a:t>
             </a:fld>
             <a:endParaRPr lang="en-US"/>
           </a:p>
@@ -2305,7 +2334,7 @@
           <a:p>
             <a:fld id="{5E75A0DC-66C6-4CEC-A5EB-F8C97CEC3796}" type="datetimeFigureOut">
               <a:rPr lang="es-MX" smtClean="0"/>
-              <a:t>09/08/2022</a:t>
+              <a:t>06/08/2026</a:t>
             </a:fld>
             <a:endParaRPr lang="es-MX" dirty="0"/>
           </a:p>
@@ -2551,7 +2580,7 @@
           <a:p>
             <a:fld id="{5E75A0DC-66C6-4CEC-A5EB-F8C97CEC3796}" type="datetimeFigureOut">
               <a:rPr lang="es-MX" smtClean="0"/>
-              <a:t>09/08/2022</a:t>
+              <a:t>06/08/2026</a:t>
             </a:fld>
             <a:endParaRPr lang="es-MX" dirty="0"/>
           </a:p>
@@ -2839,7 +2868,7 @@
           <a:p>
             <a:fld id="{5E75A0DC-66C6-4CEC-A5EB-F8C97CEC3796}" type="datetimeFigureOut">
               <a:rPr lang="es-MX" smtClean="0"/>
-              <a:t>09/08/2022</a:t>
+              <a:t>06/08/2026</a:t>
             </a:fld>
             <a:endParaRPr lang="es-MX" dirty="0"/>
           </a:p>
@@ -3261,7 +3290,7 @@
           <a:p>
             <a:fld id="{5E75A0DC-66C6-4CEC-A5EB-F8C97CEC3796}" type="datetimeFigureOut">
               <a:rPr lang="es-MX" smtClean="0"/>
-              <a:t>09/08/2022</a:t>
+              <a:t>06/08/2026</a:t>
             </a:fld>
             <a:endParaRPr lang="es-MX" dirty="0"/>
           </a:p>
@@ -3379,7 +3408,7 @@
           <a:p>
             <a:fld id="{5E75A0DC-66C6-4CEC-A5EB-F8C97CEC3796}" type="datetimeFigureOut">
               <a:rPr lang="es-MX" smtClean="0"/>
-              <a:t>09/08/2022</a:t>
+              <a:t>06/08/2026</a:t>
             </a:fld>
             <a:endParaRPr lang="es-MX" dirty="0"/>
           </a:p>
@@ -3474,7 +3503,7 @@
           <a:p>
             <a:fld id="{5E75A0DC-66C6-4CEC-A5EB-F8C97CEC3796}" type="datetimeFigureOut">
               <a:rPr lang="es-MX" smtClean="0"/>
-              <a:t>09/08/2022</a:t>
+              <a:t>06/08/2026</a:t>
             </a:fld>
             <a:endParaRPr lang="es-MX" dirty="0"/>
           </a:p>
@@ -3751,7 +3780,7 @@
           <a:p>
             <a:fld id="{5E75A0DC-66C6-4CEC-A5EB-F8C97CEC3796}" type="datetimeFigureOut">
               <a:rPr lang="es-MX" smtClean="0"/>
-              <a:t>09/08/2022</a:t>
+              <a:t>06/08/2026</a:t>
             </a:fld>
             <a:endParaRPr lang="es-MX" dirty="0"/>
           </a:p>
@@ -4004,7 +4033,7 @@
           <a:p>
             <a:fld id="{5E75A0DC-66C6-4CEC-A5EB-F8C97CEC3796}" type="datetimeFigureOut">
               <a:rPr lang="es-MX" smtClean="0"/>
-              <a:t>09/08/2022</a:t>
+              <a:t>06/08/2026</a:t>
             </a:fld>
             <a:endParaRPr lang="es-MX" dirty="0"/>
           </a:p>
@@ -4217,7 +4246,7 @@
           <a:p>
             <a:fld id="{5E75A0DC-66C6-4CEC-A5EB-F8C97CEC3796}" type="datetimeFigureOut">
               <a:rPr lang="es-MX" smtClean="0"/>
-              <a:t>09/08/2022</a:t>
+              <a:t>06/08/2026</a:t>
             </a:fld>
             <a:endParaRPr lang="es-MX" dirty="0"/>
           </a:p>
@@ -4612,7 +4641,7 @@
         </p:spPr>
         <p:txBody>
           <a:bodyPr rtlCol="0">
-            <a:normAutofit fontScale="90000"/>
+            <a:normAutofit/>
           </a:bodyPr>
           <a:lstStyle/>
           <a:p>
@@ -4630,7 +4659,7 @@
                   </a:schemeClr>
                 </a:solidFill>
               </a:rPr>
-              <a:t>TC1028 </a:t>
+              <a:t>TC 1037 </a:t>
             </a:r>
             <a:br>
               <a:rPr lang="es-MX" sz="3200" dirty="0">
@@ -4642,15 +4671,22 @@
               </a:rPr>
             </a:br>
             <a:r>
-              <a:rPr lang="es-MX" sz="3200" dirty="0">
+              <a:rPr lang="es-MX" sz="3200">
                 <a:solidFill>
                   <a:schemeClr val="bg2">
                     <a:lumMod val="50000"/>
                   </a:schemeClr>
                 </a:solidFill>
               </a:rPr>
-              <a:t>Pensamiento Computacional para Ingeniería</a:t>
-            </a:r>
+              <a:t>Pensamiento algorítmico</a:t>
+            </a:r>
+            <a:endParaRPr lang="es-MX" sz="3200" dirty="0">
+              <a:solidFill>
+                <a:schemeClr val="bg2">
+                  <a:lumMod val="50000"/>
+                </a:schemeClr>
+              </a:solidFill>
+            </a:endParaRPr>
           </a:p>
         </p:txBody>
       </p:sp>
